--- a/aulas/aula-04-sinal-v1/slides-aula-04-sinal-v1.pptx
+++ b/aulas/aula-04-sinal-v1/slides-aula-04-sinal-v1.pptx
@@ -3700,7 +3700,7 @@
                   <a:srgbClr val="F0F4F8"/>
                 </a:solidFill>
               </a:rPr>
-              <a:t>~30 min de teoria + ~90 min de live coding</a:t>
+              <a:t>20 min de teoria + 40 min de live coding</a:t>
             </a:r>
           </a:p>
         </p:txBody>
